--- a/ppt/out/WLC2급_제05강_일본슈카츠와세계의웰다잉문화.pptx
+++ b/ppt/out/WLC2급_제05강_일본슈카츠와세계의웰다잉문화.pptx
@@ -160,7 +160,7 @@
   <p:extLst>
     <p:ext uri="{521415D9-36F7-43E2-AB2F-B90AF26B5E84}">
       <p14:sectionLst xmlns:p14="http://schemas.microsoft.com/office/powerpoint/2010/main">
-        <p14:section name="열기" id="{8f5ad609-6571-007e-46bd-ade06b016fcd}">
+        <p14:section name="열기" id="{2d759087-1961-3205-b94b-3633e373dd31}">
           <p14:sldIdLst>
             <p14:sldId id="256"/>
             <p14:sldId id="257"/>
@@ -173,7 +173,7 @@
             <p14:sldId id="264"/>
           </p14:sldIdLst>
         </p14:section>
-        <p14:section name="1교시 일본 슈카츠" id="{c49e71aa-c8ee-5547-c237-ec33083ca405}">
+        <p14:section name="1교시 일본 슈카츠" id="{21e47211-a0b6-96af-ec37-3a1838c3d185}">
           <p14:sldIdLst>
             <p14:sldId id="265"/>
             <p14:sldId id="266"/>
@@ -188,7 +188,7 @@
             <p14:sldId id="275"/>
           </p14:sldIdLst>
         </p14:section>
-        <p14:section name="2교시 세계의 웰다잉 문화" id="{90a25d63-50e6-0645-f88b-43b5bab104d2}">
+        <p14:section name="2교시 세계의 웰다잉 문화" id="{4ba14f1e-1bf1-d49e-f854-1750488ad408}">
           <p14:sldIdLst>
             <p14:sldId id="276"/>
             <p14:sldId id="277"/>
@@ -206,7 +206,7 @@
             <p14:sldId id="289"/>
           </p14:sldIdLst>
         </p14:section>
-        <p14:section name="3교시 원리를 배워 내 프로그램으로" id="{f5e198af-f4ec-e324-b5a9-baa57a8e978a}">
+        <p14:section name="3교시 원리를 배워 내 프로그램으로" id="{ece5b651-206c-d783-9753-da24bfc2da14}">
           <p14:sldIdLst>
             <p14:sldId id="290"/>
             <p14:sldId id="291"/>
@@ -224,7 +224,7 @@
             <p14:sldId id="303"/>
           </p14:sldIdLst>
         </p14:section>
-        <p14:section name="정리와 예고" id="{12b08524-9d43-cc91-405c-0e882ec405bf}">
+        <p14:section name="정리와 예고" id="{2f64afb1-8cdf-7a00-be70-b46632397d7c}">
           <p14:sldIdLst>
             <p14:sldId id="304"/>
             <p14:sldId id="305"/>
@@ -6567,7 +6567,7 @@
         <p:spPr>
           <a:xfrm>
             <a:off x="548640" y="2560320"/>
-            <a:ext cx="9144000" cy="1097280"/>
+            <a:ext cx="10607040" cy="1097280"/>
           </a:xfrm>
           <a:prstGeom prst="rect">
             <a:avLst/>
@@ -52249,47 +52249,47 @@
 </file>
 
 <file path=ppt/theme/theme1.xml><?xml version="1.0" encoding="utf-8"?>
-<a:theme xmlns:a="http://schemas.openxmlformats.org/drawingml/2006/main" name="WLC Teal">
+<a:theme xmlns:a="http://schemas.openxmlformats.org/drawingml/2006/main" name="Office Theme">
   <a:themeElements>
-    <a:clrScheme name="WLC Teal">
+    <a:clrScheme name="Office">
       <a:dk1>
-        <a:srgbClr val="222222"/>
+        <a:sysClr val="windowText" lastClr="000000"/>
       </a:dk1>
       <a:lt1>
-        <a:srgbClr val="FFFFFF"/>
+        <a:sysClr val="window" lastClr="FFFFFF"/>
       </a:lt1>
       <a:dk2>
-        <a:srgbClr val="1F4E4A"/>
+        <a:srgbClr val="44546A"/>
       </a:dk2>
       <a:lt2>
-        <a:srgbClr val="EAF3F0"/>
+        <a:srgbClr val="E7E6E6"/>
       </a:lt2>
       <a:accent1>
-        <a:srgbClr val="2E7D6B"/>
+        <a:srgbClr val="4472C4"/>
       </a:accent1>
       <a:accent2>
-        <a:srgbClr val="D98E04"/>
+        <a:srgbClr val="ED7D31"/>
       </a:accent2>
       <a:accent3>
-        <a:srgbClr val="3A6EA5"/>
+        <a:srgbClr val="A5A5A5"/>
       </a:accent3>
       <a:accent4>
-        <a:srgbClr val="B5452F"/>
+        <a:srgbClr val="FFC000"/>
       </a:accent4>
       <a:accent5>
-        <a:srgbClr val="8FB9A8"/>
+        <a:srgbClr val="5B9BD5"/>
       </a:accent5>
       <a:accent6>
-        <a:srgbClr val="6B6B6B"/>
+        <a:srgbClr val="70AD47"/>
       </a:accent6>
       <a:hlink>
-        <a:srgbClr val="3A6EA5"/>
+        <a:srgbClr val="0563C1"/>
       </a:hlink>
       <a:folHlink>
-        <a:srgbClr val="1F4E4A"/>
+        <a:srgbClr val="954F72"/>
       </a:folHlink>
     </a:clrScheme>
-    <a:fontScheme name="WLC Teal">
+    <a:fontScheme name="Office">
       <a:majorFont>
         <a:latin typeface="Noto Serif KR Black"/>
         <a:ea typeface=""/>

--- a/ppt/out/WLC2급_제05강_일본슈카츠와세계의웰다잉문화.pptx
+++ b/ppt/out/WLC2급_제05강_일본슈카츠와세계의웰다잉문화.pptx
@@ -160,7 +160,7 @@
   <p:extLst>
     <p:ext uri="{521415D9-36F7-43E2-AB2F-B90AF26B5E84}">
       <p14:sectionLst xmlns:p14="http://schemas.microsoft.com/office/powerpoint/2010/main">
-        <p14:section name="열기" id="{2d759087-1961-3205-b94b-3633e373dd31}">
+        <p14:section name="열기" id="{52d6a9e2-4f69-3d21-6c70-3d34aa06cfa3}">
           <p14:sldIdLst>
             <p14:sldId id="256"/>
             <p14:sldId id="257"/>
@@ -173,7 +173,7 @@
             <p14:sldId id="264"/>
           </p14:sldIdLst>
         </p14:section>
-        <p14:section name="1교시 일본 슈카츠" id="{21e47211-a0b6-96af-ec37-3a1838c3d185}">
+        <p14:section name="1교시 일본 슈카츠" id="{3074d89b-8f62-7fd9-5168-d6e69a07b98b}">
           <p14:sldIdLst>
             <p14:sldId id="265"/>
             <p14:sldId id="266"/>
@@ -188,7 +188,7 @@
             <p14:sldId id="275"/>
           </p14:sldIdLst>
         </p14:section>
-        <p14:section name="2교시 세계의 웰다잉 문화" id="{4ba14f1e-1bf1-d49e-f854-1750488ad408}">
+        <p14:section name="2교시 세계의 웰다잉 문화" id="{1a0951da-67bf-98d5-3696-9db638dcd426}">
           <p14:sldIdLst>
             <p14:sldId id="276"/>
             <p14:sldId id="277"/>
@@ -206,7 +206,7 @@
             <p14:sldId id="289"/>
           </p14:sldIdLst>
         </p14:section>
-        <p14:section name="3교시 원리를 배워 내 프로그램으로" id="{ece5b651-206c-d783-9753-da24bfc2da14}">
+        <p14:section name="3교시 원리를 배워 내 프로그램으로" id="{d65e6cb8-7e0a-f45d-c97b-18b6292d4ee5}">
           <p14:sldIdLst>
             <p14:sldId id="290"/>
             <p14:sldId id="291"/>
@@ -224,7 +224,7 @@
             <p14:sldId id="303"/>
           </p14:sldIdLst>
         </p14:section>
-        <p14:section name="정리와 예고" id="{2f64afb1-8cdf-7a00-be70-b46632397d7c}">
+        <p14:section name="정리와 예고" id="{8359fc08-736e-6196-0757-27b6b865a352}">
           <p14:sldIdLst>
             <p14:sldId id="304"/>
             <p14:sldId id="305"/>
@@ -52249,47 +52249,47 @@
 </file>
 
 <file path=ppt/theme/theme1.xml><?xml version="1.0" encoding="utf-8"?>
-<a:theme xmlns:a="http://schemas.openxmlformats.org/drawingml/2006/main" name="Office Theme">
+<a:theme xmlns:a="http://schemas.openxmlformats.org/drawingml/2006/main" name="WLC Teal">
   <a:themeElements>
-    <a:clrScheme name="Office">
+    <a:clrScheme name="WLC Teal">
       <a:dk1>
-        <a:sysClr val="windowText" lastClr="000000"/>
+        <a:srgbClr val="222222"/>
       </a:dk1>
       <a:lt1>
-        <a:sysClr val="window" lastClr="FFFFFF"/>
+        <a:srgbClr val="FFFFFF"/>
       </a:lt1>
       <a:dk2>
-        <a:srgbClr val="44546A"/>
+        <a:srgbClr val="1F4E4A"/>
       </a:dk2>
       <a:lt2>
-        <a:srgbClr val="E7E6E6"/>
+        <a:srgbClr val="EAF3F0"/>
       </a:lt2>
       <a:accent1>
-        <a:srgbClr val="4472C4"/>
+        <a:srgbClr val="2E7D6B"/>
       </a:accent1>
       <a:accent2>
-        <a:srgbClr val="ED7D31"/>
+        <a:srgbClr val="D98E04"/>
       </a:accent2>
       <a:accent3>
-        <a:srgbClr val="A5A5A5"/>
+        <a:srgbClr val="3A6EA5"/>
       </a:accent3>
       <a:accent4>
-        <a:srgbClr val="FFC000"/>
+        <a:srgbClr val="B5452F"/>
       </a:accent4>
       <a:accent5>
-        <a:srgbClr val="5B9BD5"/>
+        <a:srgbClr val="8FB9A8"/>
       </a:accent5>
       <a:accent6>
-        <a:srgbClr val="70AD47"/>
+        <a:srgbClr val="6B6B6B"/>
       </a:accent6>
       <a:hlink>
-        <a:srgbClr val="0563C1"/>
+        <a:srgbClr val="3A6EA5"/>
       </a:hlink>
       <a:folHlink>
-        <a:srgbClr val="954F72"/>
+        <a:srgbClr val="1F4E4A"/>
       </a:folHlink>
     </a:clrScheme>
-    <a:fontScheme name="Office">
+    <a:fontScheme name="WLC Teal">
       <a:majorFont>
         <a:latin typeface="Noto Serif KR Black"/>
         <a:ea typeface=""/>
